--- a/Topic_D/Exam_Practice/TD-L01_Writing_Workshop_Learning_Institutions_and_Stages_of_Education.pptx
+++ b/Topic_D/Exam_Practice/TD-L01_Writing_Workshop_Learning_Institutions_and_Stages_of_Education.pptx
@@ -784,7 +784,11 @@
           <a:lstStyle/>
           <a:p>
             <a:r>
-              <a:rPr lang="en-US" dirty="0"/>
+              <a:rPr lang="ar-SA" dirty="0">
+                <a:latin typeface="Amiri" pitchFamily="2" charset="-78"/>
+                <a:ea typeface="Amiri" pitchFamily="2" charset="-78"/>
+                <a:cs typeface="Amiri" pitchFamily="2" charset="-78"/>
+              </a:rPr>
               <a:t>Q3 (3 min to choose and read). Title (أ) suits Core and Develop; title (ب) suits Stretch.</a:t>
             </a:r>
             <a:endParaRPr lang="en-US" dirty="0"/>
@@ -1403,7 +1407,11 @@
           <a:lstStyle/>
           <a:p>
             <a:r>
-              <a:rPr lang="en-US" dirty="0"/>
+              <a:rPr lang="ar-SA" dirty="0">
+                <a:latin typeface="Amiri" pitchFamily="2" charset="-78"/>
+                <a:ea typeface="Amiri" pitchFamily="2" charset="-78"/>
+                <a:cs typeface="Amiri" pitchFamily="2" charset="-78"/>
+              </a:rPr>
               <a:t>WELCOME (1 min) — while students join.
 • Greet each student by name as they arrive: السَّلَامُ عَلَيْكُمْ. Take the register (Pastoral Tracker: attendance 0/1).
 • 2-MINUTE CHECK-IN (SEND training): a private chat to any student who seemed unsettled last lesson — “Are you okay today? 👍 / 👎”.
@@ -1936,7 +1944,11 @@
           <a:lstStyle/>
           <a:p>
             <a:r>
-              <a:rPr lang="en-US" dirty="0"/>
+              <a:rPr lang="ar-SA" dirty="0">
+                <a:latin typeface="Amiri" pitchFamily="2" charset="-78"/>
+                <a:ea typeface="Amiri" pitchFamily="2" charset="-78"/>
+                <a:cs typeface="Amiri" pitchFamily="2" charset="-78"/>
+              </a:rPr>
               <a:t>Question words: كَيْفَ (what … like) · مَا الفَرْقُ (what is the difference — use PAST for the old school) · لِمَاذَا (why) · سَتَفْعَلُ (will do — FUTURE).</a:t>
             </a:r>
             <a:endParaRPr lang="en-US" dirty="0"/>
@@ -2508,6 +2520,7 @@
                   <a:srgbClr val="D4AF37"/>
                 </a:solidFill>
                 <a:latin typeface="Amiri" pitchFamily="2" charset="-78"/>
+                <a:ea typeface="Amiri" pitchFamily="2" charset="-78"/>
                 <a:cs typeface="Amiri" pitchFamily="2" charset="-78"/>
               </a:rPr>
               <a:t>م</a:t>
@@ -2714,6 +2727,7 @@
                   <a:srgbClr val="D4AF37"/>
                 </a:solidFill>
                 <a:latin typeface="Amiri" pitchFamily="2" charset="-78"/>
+                <a:ea typeface="Amiri" pitchFamily="2" charset="-78"/>
                 <a:cs typeface="Amiri" pitchFamily="2" charset="-78"/>
               </a:rPr>
               <a:t>وَرْشَةُ الكِتَابَةِ — مَرَاحِلُ التَّعْلِيمِ</a:t>
@@ -3171,6 +3185,7 @@
                   <a:srgbClr val="D4AF37"/>
                 </a:solidFill>
                 <a:latin typeface="Amiri" pitchFamily="2" charset="-78"/>
+                <a:ea typeface="Amiri" pitchFamily="2" charset="-78"/>
                 <a:cs typeface="Amiri" pitchFamily="2" charset="-78"/>
               </a:rPr>
               <a:t>م</a:t>
@@ -3491,6 +3506,7 @@
                   <a:srgbClr val="8A6D1E"/>
                 </a:solidFill>
                 <a:latin typeface="Amiri" pitchFamily="2" charset="-78"/>
+                <a:ea typeface="Amiri" pitchFamily="2" charset="-78"/>
                 <a:cs typeface="Amiri" pitchFamily="2" charset="-78"/>
               </a:rPr>
               <a:t>نَمُوذَجُ الإِجَابَةِ</a:t>
@@ -3604,6 +3620,7 @@
                   <a:srgbClr val="1F2A37"/>
                 </a:solidFill>
                 <a:latin typeface="Amiri" pitchFamily="2" charset="-78"/>
+                <a:ea typeface="Amiri" pitchFamily="2" charset="-78"/>
                 <a:cs typeface="Amiri" pitchFamily="2" charset="-78"/>
               </a:rPr>
               <a:t>مَرْحَبًا يَا مُحَمَّدُ،</a:t>
@@ -3623,6 +3640,7 @@
                   <a:srgbClr val="1F2A37"/>
                 </a:solidFill>
                 <a:latin typeface="Amiri" pitchFamily="2" charset="-78"/>
+                <a:ea typeface="Amiri" pitchFamily="2" charset="-78"/>
                 <a:cs typeface="Amiri" pitchFamily="2" charset="-78"/>
               </a:rPr>
               <a:t>كَيْفَ حَالُكَ؟ أُرِيدُ أَنْ أُخْبِرَكَ عَنْ مَدْرَسَتِي الجَدِيدَةِ. هِيَ مَدْرَسَةٌ ثَانَوِيَّةٌ حُكُومِيَّةٌ مُخْتَلَطَةٌ، وَفِيهَا أَلْفُ طَالِبٍ. المَبْنَى حَدِيثٌ، وَفِيهِ مُخْتَبَرَاتٌ كَبِيرَةٌ وَمَكْتَبَةٌ جَمِيلَةٌ. مَدْرَسَتِي القَدِيمَةُ كَانَتْ صَغِيرَةً وَقَرِيبَةً مِنْ بَيْتِي، وَكُنْتُ أَمْشِي إِلَيْهَا. أَمَّا الآنَ فَأَرْكَبُ الحَافِلَةَ. فِي رَأْيِي، مَدْرَسَتِي الجَدِيدَةُ أَفْضَلُ، لِأَنَّ النَّشَاطَاتِ فِيهَا أَكْثَرُ. لٰكِنَّ الوَاجِبَاتِ أَصْعَبُ! بَعْدَ المَدْرَسَةِ سَأَدْرُسُ فِي الجَامِعَةِ، وَأُرِيدُ أَنْ أُصْبِحَ طَبِيبًا.</a:t>
@@ -3642,6 +3660,7 @@
                   <a:srgbClr val="1F2A37"/>
                 </a:solidFill>
                 <a:latin typeface="Amiri" pitchFamily="2" charset="-78"/>
+                <a:ea typeface="Amiri" pitchFamily="2" charset="-78"/>
                 <a:cs typeface="Amiri" pitchFamily="2" charset="-78"/>
               </a:rPr>
               <a:t>إِلَى اللِّقَاءِ،</a:t>
@@ -3661,6 +3680,7 @@
                   <a:srgbClr val="1F2A37"/>
                 </a:solidFill>
                 <a:latin typeface="Amiri" pitchFamily="2" charset="-78"/>
+                <a:ea typeface="Amiri" pitchFamily="2" charset="-78"/>
                 <a:cs typeface="Amiri" pitchFamily="2" charset="-78"/>
               </a:rPr>
               <a:t>عُمَرُ</a:t>
@@ -3824,11 +3844,12 @@
               <a:buNone/>
             </a:pPr>
             <a:r>
-              <a:rPr lang="en-US" sz="950" b="1" dirty="0">
+              <a:rPr lang="ar-SA" sz="950" b="1" dirty="0">
                 <a:solidFill>
                   <a:srgbClr val="FFFFFF"/>
                 </a:solidFill>
                 <a:latin typeface="Calibri" pitchFamily="34" charset="0"/>
+                <a:ea typeface="Amiri" pitchFamily="2" charset="-78"/>
                 <a:cs typeface="Amiri" pitchFamily="2" charset="-78"/>
               </a:rPr>
               <a:t>ثَانَوِيَّةٌ حُكُومِيَّةٌ مُخْتَلَطَةٌ</a:t>
@@ -3889,11 +3910,12 @@
               <a:buNone/>
             </a:pPr>
             <a:r>
-              <a:rPr lang="en-US" sz="950" b="1" dirty="0">
+              <a:rPr lang="ar-SA" sz="950" b="1" dirty="0">
                 <a:solidFill>
                   <a:srgbClr val="FFFFFF"/>
                 </a:solidFill>
                 <a:latin typeface="Calibri" pitchFamily="34" charset="0"/>
+                <a:ea typeface="Amiri" pitchFamily="2" charset="-78"/>
                 <a:cs typeface="Amiri" pitchFamily="2" charset="-78"/>
               </a:rPr>
               <a:t>كَانَتْ صَغِيرَةً</a:t>
@@ -3954,11 +3976,12 @@
               <a:buNone/>
             </a:pPr>
             <a:r>
-              <a:rPr lang="en-US" sz="950" b="1" dirty="0">
+              <a:rPr lang="ar-SA" sz="950" b="1" dirty="0">
                 <a:solidFill>
                   <a:srgbClr val="FFFFFF"/>
                 </a:solidFill>
                 <a:latin typeface="Calibri" pitchFamily="34" charset="0"/>
+                <a:ea typeface="Amiri" pitchFamily="2" charset="-78"/>
                 <a:cs typeface="Amiri" pitchFamily="2" charset="-78"/>
               </a:rPr>
               <a:t>أَمَّا الآنَ فَأَرْكَبُ</a:t>
@@ -4019,11 +4042,12 @@
               <a:buNone/>
             </a:pPr>
             <a:r>
-              <a:rPr lang="en-US" sz="950" b="1" dirty="0">
+              <a:rPr lang="ar-SA" sz="950" b="1" dirty="0">
                 <a:solidFill>
                   <a:srgbClr val="FFFFFF"/>
                 </a:solidFill>
                 <a:latin typeface="Calibri" pitchFamily="34" charset="0"/>
+                <a:ea typeface="Amiri" pitchFamily="2" charset="-78"/>
                 <a:cs typeface="Amiri" pitchFamily="2" charset="-78"/>
               </a:rPr>
               <a:t>سَأَدْرُسُ فِي الجَامِعَةِ</a:t>
@@ -4157,6 +4181,7 @@
                   <a:srgbClr val="D4AF37"/>
                 </a:solidFill>
                 <a:latin typeface="Amiri" pitchFamily="2" charset="-78"/>
+                <a:ea typeface="Amiri" pitchFamily="2" charset="-78"/>
                 <a:cs typeface="Amiri" pitchFamily="2" charset="-78"/>
               </a:rPr>
               <a:t>م</a:t>
@@ -4477,6 +4502,7 @@
                   <a:srgbClr val="8A6D1E"/>
                 </a:solidFill>
                 <a:latin typeface="Amiri" pitchFamily="2" charset="-78"/>
+                <a:ea typeface="Amiri" pitchFamily="2" charset="-78"/>
                 <a:cs typeface="Amiri" pitchFamily="2" charset="-78"/>
               </a:rPr>
               <a:t>نَمُوذَجُ الإِجَابَةِ</a:t>
@@ -4590,6 +4616,7 @@
                   <a:srgbClr val="1F2A37"/>
                 </a:solidFill>
                 <a:latin typeface="Amiri" pitchFamily="2" charset="-78"/>
+                <a:ea typeface="Amiri" pitchFamily="2" charset="-78"/>
                 <a:cs typeface="Amiri" pitchFamily="2" charset="-78"/>
               </a:rPr>
               <a:t>عَزِيزِي مُحَمَّدُ،</a:t>
@@ -4609,6 +4636,7 @@
                   <a:srgbClr val="1F2A37"/>
                 </a:solidFill>
                 <a:latin typeface="Amiri" pitchFamily="2" charset="-78"/>
+                <a:ea typeface="Amiri" pitchFamily="2" charset="-78"/>
                 <a:cs typeface="Amiri" pitchFamily="2" charset="-78"/>
               </a:rPr>
               <a:t>سَأَلْتَنِي عَنْ مَدْرَسَتِي الجَدِيدَةِ، فَإِلَيْكَ الصُّورَةَ كَامِلَةً: انْتَقَلْتُ هٰذَا العَامَ إِلَى مَدْرَسَةٍ ثَانَوِيَّةٍ حُكُومِيَّةٍ مُخْتَلَطَةٍ تَضُمُّ أَكْثَرَ مِنْ أَلْفِ طَالِبٍ وَطَالِبَةٍ، وَمَبْنَاهَا الحَدِيثُ مُجَهَّزٌ بِمُخْتَبَرَاتٍ عِلْمِيَّةٍ وَمَكْتَبَةٍ رَقْمِيَّةٍ رَائِعَةٍ. وَعَلَى عَكْسِ مَدْرَسَتِي الابْتِدَائِيَّةِ الصَّغِيرَةِ الَّتِي كُنْتُ أَمْشِي إِلَيْهَا فِي خَمْسِ دَقَائِقَ، أَرْكَبُ الآنَ حَافِلَتَيْنِ كُلَّ صَبَاحٍ. صَحِيحٌ أَنَّ الطَّرِيقَ أَطْوَلُ وَالوَاجِبَاتِ أَصْعَبُ، غَيْرَ أَنَّ النَّوَادِيَ وَالرِّحْلَاتِ هُنَا لَا تُقَارَنُ بِمَا عَرَفْتُهُ مِنْ قَبْلُ. وَإِذَا حَصَلْتُ عَلَى نَتَائِجَ جَيِّدَةٍ، فَسَأَدْرُسُ الطِّبَّ فِي جَامِعَةِ لَنْدَنَ، كَمَا فَعَلَ أَخِي الأَكْبَرُ.</a:t>
@@ -4628,6 +4656,7 @@
                   <a:srgbClr val="1F2A37"/>
                 </a:solidFill>
                 <a:latin typeface="Amiri" pitchFamily="2" charset="-78"/>
+                <a:ea typeface="Amiri" pitchFamily="2" charset="-78"/>
                 <a:cs typeface="Amiri" pitchFamily="2" charset="-78"/>
               </a:rPr>
               <a:t>مَعَ تَحِيَّاتِي،</a:t>
@@ -4647,6 +4676,7 @@
                   <a:srgbClr val="1F2A37"/>
                 </a:solidFill>
                 <a:latin typeface="Amiri" pitchFamily="2" charset="-78"/>
+                <a:ea typeface="Amiri" pitchFamily="2" charset="-78"/>
                 <a:cs typeface="Amiri" pitchFamily="2" charset="-78"/>
               </a:rPr>
               <a:t>عُمَرُ</a:t>
@@ -4810,11 +4840,12 @@
               <a:buNone/>
             </a:pPr>
             <a:r>
-              <a:rPr lang="en-US" sz="950" b="1" dirty="0">
+              <a:rPr lang="ar-SA" sz="950" b="1" dirty="0">
                 <a:solidFill>
                   <a:srgbClr val="FFFFFF"/>
                 </a:solidFill>
                 <a:latin typeface="Calibri" pitchFamily="34" charset="0"/>
+                <a:ea typeface="Amiri" pitchFamily="2" charset="-78"/>
                 <a:cs typeface="Amiri" pitchFamily="2" charset="-78"/>
               </a:rPr>
               <a:t>تَضُمُّ أَكْثَرَ مِنْ</a:t>
@@ -4875,11 +4906,12 @@
               <a:buNone/>
             </a:pPr>
             <a:r>
-              <a:rPr lang="en-US" sz="950" b="1" dirty="0">
+              <a:rPr lang="ar-SA" sz="950" b="1" dirty="0">
                 <a:solidFill>
                   <a:srgbClr val="FFFFFF"/>
                 </a:solidFill>
                 <a:latin typeface="Calibri" pitchFamily="34" charset="0"/>
+                <a:ea typeface="Amiri" pitchFamily="2" charset="-78"/>
                 <a:cs typeface="Amiri" pitchFamily="2" charset="-78"/>
               </a:rPr>
               <a:t>عَلَى عَكْسِ</a:t>
@@ -4940,11 +4972,12 @@
               <a:buNone/>
             </a:pPr>
             <a:r>
-              <a:rPr lang="en-US" sz="950" b="1" dirty="0">
+              <a:rPr lang="ar-SA" sz="950" b="1" dirty="0">
                 <a:solidFill>
                   <a:srgbClr val="FFFFFF"/>
                 </a:solidFill>
                 <a:latin typeface="Calibri" pitchFamily="34" charset="0"/>
+                <a:ea typeface="Amiri" pitchFamily="2" charset="-78"/>
                 <a:cs typeface="Amiri" pitchFamily="2" charset="-78"/>
               </a:rPr>
               <a:t>الَّتِي كُنْتُ أَمْشِي إِلَيْهَا</a:t>
@@ -5005,11 +5038,12 @@
               <a:buNone/>
             </a:pPr>
             <a:r>
-              <a:rPr lang="en-US" sz="950" b="1" dirty="0">
+              <a:rPr lang="ar-SA" sz="950" b="1" dirty="0">
                 <a:solidFill>
                   <a:srgbClr val="FFFFFF"/>
                 </a:solidFill>
                 <a:latin typeface="Calibri" pitchFamily="34" charset="0"/>
+                <a:ea typeface="Amiri" pitchFamily="2" charset="-78"/>
                 <a:cs typeface="Amiri" pitchFamily="2" charset="-78"/>
               </a:rPr>
               <a:t>إِذَا حَصَلْتُ … فَسَأَدْرُسُ</a:t>
@@ -5143,6 +5177,7 @@
                   <a:srgbClr val="D4AF37"/>
                 </a:solidFill>
                 <a:latin typeface="Amiri" pitchFamily="2" charset="-78"/>
+                <a:ea typeface="Amiri" pitchFamily="2" charset="-78"/>
                 <a:cs typeface="Amiri" pitchFamily="2" charset="-78"/>
               </a:rPr>
               <a:t>م</a:t>
@@ -5463,6 +5498,7 @@
                   <a:srgbClr val="8A6D1E"/>
                 </a:solidFill>
                 <a:latin typeface="Amiri" pitchFamily="2" charset="-78"/>
+                <a:ea typeface="Amiri" pitchFamily="2" charset="-78"/>
                 <a:cs typeface="Amiri" pitchFamily="2" charset="-78"/>
               </a:rPr>
               <a:t>اخْتَرْ عُنْوَانًا وَاحِدًا</a:t>
@@ -5743,6 +5779,7 @@
                   <a:srgbClr val="1B3B6F"/>
                 </a:solidFill>
                 <a:latin typeface="Amiri" pitchFamily="2" charset="-78"/>
+                <a:ea typeface="Amiri" pitchFamily="2" charset="-78"/>
                 <a:cs typeface="Amiri" pitchFamily="2" charset="-78"/>
               </a:rPr>
               <a:t>رِحْلَتِي التَّعْلِيمِيَّةُ</a:t>
@@ -5781,6 +5818,7 @@
                   <a:srgbClr val="1B3B6F"/>
                 </a:solidFill>
                 <a:latin typeface="Amiri" pitchFamily="2" charset="-78"/>
+                <a:ea typeface="Amiri" pitchFamily="2" charset="-78"/>
                 <a:cs typeface="Amiri" pitchFamily="2" charset="-78"/>
               </a:rPr>
               <a:t>(أ)</a:t>
@@ -5887,6 +5925,7 @@
                   <a:srgbClr val="1B3B6F"/>
                 </a:solidFill>
                 <a:latin typeface="Amiri" pitchFamily="2" charset="-78"/>
+                <a:ea typeface="Amiri" pitchFamily="2" charset="-78"/>
                 <a:cs typeface="Amiri" pitchFamily="2" charset="-78"/>
               </a:rPr>
               <a:t>مَدْرَسَتُكَ الآنَ · المَرْحَلَةُ الابْتِدَائِيَّةُ · مُقَارَنَةٌ بَيْنَ المَرْحَلَتَيْنِ · خِطَطُكَ بَعْدَ المَدْرَسَةِ</a:t>
@@ -6018,6 +6057,7 @@
                   <a:srgbClr val="1B3B6F"/>
                 </a:solidFill>
                 <a:latin typeface="Amiri" pitchFamily="2" charset="-78"/>
+                <a:ea typeface="Amiri" pitchFamily="2" charset="-78"/>
                 <a:cs typeface="Amiri" pitchFamily="2" charset="-78"/>
               </a:rPr>
               <a:t>حُكُومِيَّةٌ أَمْ خَاصَّةٌ أَمْ إِلِكْتْرُونِيَّةٌ؟</a:t>
@@ -6056,6 +6096,7 @@
                   <a:srgbClr val="1B3B6F"/>
                 </a:solidFill>
                 <a:latin typeface="Amiri" pitchFamily="2" charset="-78"/>
+                <a:ea typeface="Amiri" pitchFamily="2" charset="-78"/>
                 <a:cs typeface="Amiri" pitchFamily="2" charset="-78"/>
               </a:rPr>
               <a:t>(ب)</a:t>
@@ -6159,6 +6200,7 @@
                   <a:srgbClr val="1B3B6F"/>
                 </a:solidFill>
                 <a:latin typeface="Amiri" pitchFamily="2" charset="-78"/>
+                <a:ea typeface="Amiri" pitchFamily="2" charset="-78"/>
                 <a:cs typeface="Amiri" pitchFamily="2" charset="-78"/>
               </a:rPr>
               <a:t>أَنْوَاعُ المَدَارِسِ · المَزَايَا وَالعُيُوبُ · تَجْرِبَتُكَ · رَأْيُكَ</a:t>
@@ -6358,6 +6400,7 @@
                   <a:srgbClr val="D4AF37"/>
                 </a:solidFill>
                 <a:latin typeface="Amiri" pitchFamily="2" charset="-78"/>
+                <a:ea typeface="Amiri" pitchFamily="2" charset="-78"/>
                 <a:cs typeface="Amiri" pitchFamily="2" charset="-78"/>
               </a:rPr>
               <a:t>م</a:t>
@@ -6678,6 +6721,7 @@
                   <a:srgbClr val="8A6D1E"/>
                 </a:solidFill>
                 <a:latin typeface="Amiri" pitchFamily="2" charset="-78"/>
+                <a:ea typeface="Amiri" pitchFamily="2" charset="-78"/>
                 <a:cs typeface="Amiri" pitchFamily="2" charset="-78"/>
               </a:rPr>
               <a:t>خُطَّةُ الكِتَابَةِ</a:t>
@@ -7302,6 +7346,7 @@
                   <a:srgbClr val="1B3B6F"/>
                 </a:solidFill>
                 <a:latin typeface="Amiri" pitchFamily="2" charset="-78"/>
+                <a:ea typeface="Amiri" pitchFamily="2" charset="-78"/>
                 <a:cs typeface="Amiri" pitchFamily="2" charset="-78"/>
               </a:rPr>
               <a:t>مَدْرَسَتِي كَبِيرَةٌ وَمُخْتَلَطَةٌ، وَفِيهَا مُخْتَبَرَاتٌ حَدِيثَةٌ.</a:t>
@@ -7401,6 +7446,7 @@
                   <a:srgbClr val="1B3B6F"/>
                 </a:solidFill>
                 <a:latin typeface="Amiri" pitchFamily="2" charset="-78"/>
+                <a:ea typeface="Amiri" pitchFamily="2" charset="-78"/>
                 <a:cs typeface="Amiri" pitchFamily="2" charset="-78"/>
               </a:rPr>
               <a:t>كَانَتْ قَرِيبَةً مِنْ بَيْتِي، وَكُنَّا نَلْعَبُ فِي الحَدِيقَةِ.</a:t>
@@ -7500,6 +7546,7 @@
                   <a:srgbClr val="1B3B6F"/>
                 </a:solidFill>
                 <a:latin typeface="Amiri" pitchFamily="2" charset="-78"/>
+                <a:ea typeface="Amiri" pitchFamily="2" charset="-78"/>
                 <a:cs typeface="Amiri" pitchFamily="2" charset="-78"/>
               </a:rPr>
               <a:t>سَأَدْرُسُ فِي كُلِّيَّةٍ قَرِيبَةٍ، ثُمَّ سَأَذْهَبُ إِلَى الجَامِعَةِ.</a:t>
@@ -7661,6 +7708,7 @@
                   <a:srgbClr val="1F2A37"/>
                 </a:solidFill>
                 <a:latin typeface="Amiri" pitchFamily="2" charset="-78"/>
+                <a:ea typeface="Amiri" pitchFamily="2" charset="-78"/>
                 <a:cs typeface="Amiri" pitchFamily="2" charset="-78"/>
               </a:rPr>
               <a:t>أ</a:t>
@@ -7687,6 +7735,7 @@
                   <a:srgbClr val="1F2A37"/>
                 </a:solidFill>
                 <a:latin typeface="Amiri" pitchFamily="2" charset="-78"/>
+                <a:ea typeface="Amiri" pitchFamily="2" charset="-78"/>
                 <a:cs typeface="Amiri" pitchFamily="2" charset="-78"/>
               </a:rPr>
               <a:t>ب</a:t>
@@ -7833,6 +7882,7 @@
                   <a:srgbClr val="D4AF37"/>
                 </a:solidFill>
                 <a:latin typeface="Amiri" pitchFamily="2" charset="-78"/>
+                <a:ea typeface="Amiri" pitchFamily="2" charset="-78"/>
                 <a:cs typeface="Amiri" pitchFamily="2" charset="-78"/>
               </a:rPr>
               <a:t>م</a:t>
@@ -8090,6 +8140,7 @@
                   <a:srgbClr val="8A6D1E"/>
                 </a:solidFill>
                 <a:latin typeface="Amiri" pitchFamily="2" charset="-78"/>
+                <a:ea typeface="Amiri" pitchFamily="2" charset="-78"/>
                 <a:cs typeface="Amiri" pitchFamily="2" charset="-78"/>
               </a:rPr>
               <a:t>أ</a:t>
@@ -8154,6 +8205,7 @@
                   <a:srgbClr val="1B3B6F"/>
                 </a:solidFill>
                 <a:latin typeface="Amiri" pitchFamily="2" charset="-78"/>
+                <a:ea typeface="Amiri" pitchFamily="2" charset="-78"/>
                 <a:cs typeface="Amiri" pitchFamily="2" charset="-78"/>
               </a:rPr>
               <a:t>أ</a:t>
@@ -8205,6 +8257,7 @@
                   <a:srgbClr val="8A6D1E"/>
                 </a:solidFill>
                 <a:latin typeface="Amiri" pitchFamily="2" charset="-78"/>
+                <a:ea typeface="Amiri" pitchFamily="2" charset="-78"/>
                 <a:cs typeface="Amiri" pitchFamily="2" charset="-78"/>
               </a:rPr>
               <a:t>نَمُوذَجُ الإِجَابَةِ</a:t>
@@ -8318,6 +8371,7 @@
                   <a:srgbClr val="1F2A37"/>
                 </a:solidFill>
                 <a:latin typeface="Amiri" pitchFamily="2" charset="-78"/>
+                <a:ea typeface="Amiri" pitchFamily="2" charset="-78"/>
                 <a:cs typeface="Amiri" pitchFamily="2" charset="-78"/>
               </a:rPr>
               <a:t>أَدْرُسُ الآنَ فِي مَدْرَسَةٍ ثَانَوِيَّةٍ حُكُومِيَّةٍ فِي مَدِينَةِ لِيسْتَرَ. مَدْرَسَتِي كَبِيرَةٌ وَمُخْتَلَطَةٌ، وَفِيهَا أَلْفٌ وَمِئَتَا طَالِبٍ. عِنْدَنَا مُخْتَبَرَاتٌ حَدِيثَةٌ، وَمَلْعَبٌ كَبِيرٌ، وَمَكْتَبَةٌ هَادِئَةٌ. نَلْبَسُ زِيًّا مَدْرَسِيًّا أَزْرَقَ. يَبْدَأُ اليَوْمُ الدِّرَاسِيُّ فِي الثَّامِنَةِ وَالنِّصْفِ، وَيَنْتَهِي فِي الثَّالِثَةِ.</a:t>
@@ -8337,6 +8391,7 @@
                   <a:srgbClr val="1F2A37"/>
                 </a:solidFill>
                 <a:latin typeface="Amiri" pitchFamily="2" charset="-78"/>
+                <a:ea typeface="Amiri" pitchFamily="2" charset="-78"/>
                 <a:cs typeface="Amiri" pitchFamily="2" charset="-78"/>
               </a:rPr>
               <a:t>قَبْلَ ذٰلِكَ دَرَسْتُ فِي مَدْرَسَةٍ ابْتِدَائِيَّةٍ صَغِيرَةٍ. كَانَتْ قَرِيبَةً مِنْ بَيْتِي، وَكَانَ عِنْدَنَا مُعَلِّمٌ وَاحِدٌ لِكُلِّ المَوَادِّ. كُنْتُ أُحِبُّ القِرَاءَةَ وَالرَّسْمَ، وَكُنَّا نَلْعَبُ فِي الحَدِيقَةِ كُلَّ يَوْمٍ. كَانَتْ أَيَّامًا جَمِيلَةً وَهَادِئَةً.</a:t>
@@ -8356,6 +8411,7 @@
                   <a:srgbClr val="1F2A37"/>
                 </a:solidFill>
                 <a:latin typeface="Amiri" pitchFamily="2" charset="-78"/>
+                <a:ea typeface="Amiri" pitchFamily="2" charset="-78"/>
                 <a:cs typeface="Amiri" pitchFamily="2" charset="-78"/>
               </a:rPr>
               <a:t>فِي رَأْيِي، المَدْرَسَةُ الثَّانَوِيَّةُ أَصْعَبُ مِنَ الابْتِدَائِيَّةِ، لِأَنَّ المَوَادَّ أَكْثَرُ وَالامْتِحَانَاتِ مُهِمَّةٌ. لٰكِنَّهَا أَيْضًا أَكْثَرُ مُتْعَةً، لِأَنَّ فِيهَا نَوَادِيَ كَثِيرَةً وَرِحْلَاتٍ.</a:t>
@@ -8375,6 +8431,7 @@
                   <a:srgbClr val="1F2A37"/>
                 </a:solidFill>
                 <a:latin typeface="Amiri" pitchFamily="2" charset="-78"/>
+                <a:ea typeface="Amiri" pitchFamily="2" charset="-78"/>
                 <a:cs typeface="Amiri" pitchFamily="2" charset="-78"/>
               </a:rPr>
               <a:t>بَعْدَ الصَّفِّ الحَادِي عَشَرَ سَأَدْرُسُ فِي كُلِّيَّةٍ قَرِيبَةٍ، ثُمَّ سَأَذْهَبُ إِلَى الجَامِعَةِ. أُرِيدُ أَنْ أَدْرُسَ عِلْمَ الحَاسُوبِ، لِأَنِّي أُحِبُّ التِّكْنُولُوجْيَا كَثِيرًا وَأُرِيدُ أَنْ أُصَمِّمَ التَّطْبِيقَاتِ.</a:t>
@@ -8538,11 +8595,12 @@
               <a:buNone/>
             </a:pPr>
             <a:r>
-              <a:rPr lang="en-US" sz="950" b="1" dirty="0">
+              <a:rPr lang="ar-SA" sz="950" b="1" dirty="0">
                 <a:solidFill>
                   <a:srgbClr val="FFFFFF"/>
                 </a:solidFill>
                 <a:latin typeface="Calibri" pitchFamily="34" charset="0"/>
+                <a:ea typeface="Amiri" pitchFamily="2" charset="-78"/>
                 <a:cs typeface="Amiri" pitchFamily="2" charset="-78"/>
               </a:rPr>
               <a:t>ثَانَوِيَّةٍ حُكُومِيَّةٍ</a:t>
@@ -8603,11 +8661,12 @@
               <a:buNone/>
             </a:pPr>
             <a:r>
-              <a:rPr lang="en-US" sz="950" b="1" dirty="0">
+              <a:rPr lang="ar-SA" sz="950" b="1" dirty="0">
                 <a:solidFill>
                   <a:srgbClr val="FFFFFF"/>
                 </a:solidFill>
                 <a:latin typeface="Calibri" pitchFamily="34" charset="0"/>
+                <a:ea typeface="Amiri" pitchFamily="2" charset="-78"/>
                 <a:cs typeface="Amiri" pitchFamily="2" charset="-78"/>
               </a:rPr>
               <a:t>كَانَتْ قَرِيبَةً</a:t>
@@ -8668,11 +8727,12 @@
               <a:buNone/>
             </a:pPr>
             <a:r>
-              <a:rPr lang="en-US" sz="950" b="1" dirty="0">
+              <a:rPr lang="ar-SA" sz="950" b="1" dirty="0">
                 <a:solidFill>
                   <a:srgbClr val="FFFFFF"/>
                 </a:solidFill>
                 <a:latin typeface="Calibri" pitchFamily="34" charset="0"/>
+                <a:ea typeface="Amiri" pitchFamily="2" charset="-78"/>
                 <a:cs typeface="Amiri" pitchFamily="2" charset="-78"/>
               </a:rPr>
               <a:t>أَصْعَبُ مِنَ الابْتِدَائِيَّةِ</a:t>
@@ -8733,11 +8793,12 @@
               <a:buNone/>
             </a:pPr>
             <a:r>
-              <a:rPr lang="en-US" sz="950" b="1" dirty="0">
+              <a:rPr lang="ar-SA" sz="950" b="1" dirty="0">
                 <a:solidFill>
                   <a:srgbClr val="FFFFFF"/>
                 </a:solidFill>
                 <a:latin typeface="Calibri" pitchFamily="34" charset="0"/>
+                <a:ea typeface="Amiri" pitchFamily="2" charset="-78"/>
                 <a:cs typeface="Amiri" pitchFamily="2" charset="-78"/>
               </a:rPr>
               <a:t>سَأَدْرُسُ فِي كُلِّيَّةٍ</a:t>
@@ -8871,6 +8932,7 @@
                   <a:srgbClr val="D4AF37"/>
                 </a:solidFill>
                 <a:latin typeface="Amiri" pitchFamily="2" charset="-78"/>
+                <a:ea typeface="Amiri" pitchFamily="2" charset="-78"/>
                 <a:cs typeface="Amiri" pitchFamily="2" charset="-78"/>
               </a:rPr>
               <a:t>م</a:t>
@@ -9128,6 +9190,7 @@
                   <a:srgbClr val="8A6D1E"/>
                 </a:solidFill>
                 <a:latin typeface="Amiri" pitchFamily="2" charset="-78"/>
+                <a:ea typeface="Amiri" pitchFamily="2" charset="-78"/>
                 <a:cs typeface="Amiri" pitchFamily="2" charset="-78"/>
               </a:rPr>
               <a:t>أ</a:t>
@@ -9192,6 +9255,7 @@
                   <a:srgbClr val="1B3B6F"/>
                 </a:solidFill>
                 <a:latin typeface="Amiri" pitchFamily="2" charset="-78"/>
+                <a:ea typeface="Amiri" pitchFamily="2" charset="-78"/>
                 <a:cs typeface="Amiri" pitchFamily="2" charset="-78"/>
               </a:rPr>
               <a:t>أ</a:t>
@@ -9243,6 +9307,7 @@
                   <a:srgbClr val="8A6D1E"/>
                 </a:solidFill>
                 <a:latin typeface="Amiri" pitchFamily="2" charset="-78"/>
+                <a:ea typeface="Amiri" pitchFamily="2" charset="-78"/>
                 <a:cs typeface="Amiri" pitchFamily="2" charset="-78"/>
               </a:rPr>
               <a:t>نَمُوذَجُ الإِجَابَةِ</a:t>
@@ -9356,6 +9421,7 @@
                   <a:srgbClr val="1F2A37"/>
                 </a:solidFill>
                 <a:latin typeface="Amiri" pitchFamily="2" charset="-78"/>
+                <a:ea typeface="Amiri" pitchFamily="2" charset="-78"/>
                 <a:cs typeface="Amiri" pitchFamily="2" charset="-78"/>
               </a:rPr>
               <a:t>يُقَالُ إِنَّ المَدْرَسَةَ بَيْتٌ ثَانٍ، وَقَدْ عِشْتُ هٰذِهِ الحَقِيقَةَ فِي ثَلَاثِ مَدَارِسَ مُخْتَلِفَةٍ؛ فَكُلُّ مَرْحَلَةٍ مِنْ رِحْلَتِي التَّعْلِيمِيَّةِ تَرَكَتْ فِي نَفْسِي أَثَرًا خَاصًّا.</a:t>
@@ -9375,6 +9441,7 @@
                   <a:srgbClr val="1F2A37"/>
                 </a:solidFill>
                 <a:latin typeface="Amiri" pitchFamily="2" charset="-78"/>
+                <a:ea typeface="Amiri" pitchFamily="2" charset="-78"/>
                 <a:cs typeface="Amiri" pitchFamily="2" charset="-78"/>
               </a:rPr>
               <a:t>بَدَأْتُ فِي مَدْرَسَةٍ ابْتِدَائِيَّةٍ صَغِيرَةٍ فِي حَيِّنَا، لَمْ يَكُنْ فِيهَا أَكْثَرُ مِنْ مِئَتَيْ طَالِبٍ، وَكَانَتِ المُعَلِّمَاتُ يَعْرِفْنَ أَسْمَاءَنَا جَمِيعًا. وَهُنَاكَ تَعَلَّمْتُ أَنْ أُحِبَّ القِرَاءَةَ، بِفَضْلِ مُعَلِّمَةٍ كَانَتْ تَقْرَأُ لَنَا قِصَّةً كُلَّ يَوْمِ جُمُعَةٍ، وَتَطْلُبُ مِنَّا أَنْ نَتَخَيَّلَ نِهَايَةً مُخْتَلِفَةً لَهَا.</a:t>
@@ -9394,6 +9461,7 @@
                   <a:srgbClr val="1F2A37"/>
                 </a:solidFill>
                 <a:latin typeface="Amiri" pitchFamily="2" charset="-78"/>
+                <a:ea typeface="Amiri" pitchFamily="2" charset="-78"/>
                 <a:cs typeface="Amiri" pitchFamily="2" charset="-78"/>
               </a:rPr>
               <a:t>أَمَّا المَرْحَلَةُ الثَّانَوِيَّةُ فَكَانَتْ عَالَمًا مُخْتَلِفًا تَمَامًا؛ إِذِ انْتَقَلْتُ إِلَى مَدْرَسَةٍ حُكُومِيَّةٍ ضَخْمَةٍ، ثُمَّ إِلَى مَدْرَسَةٍ إِلِكْتْرُونِيَّةٍ لِأَدْرُسَ اللُّغَةَ العَرَبِيَّةَ الَّتِي لَمْ تَكُنْ مُتَوَفِّرَةً فِي مَدِينَتِي. وَمَعَ أَنَّنِي افْتَقَدْتُ المَلْعَبَ وَالأَصْدِقَاءَ، فَقَدْ أَصْبَحْتُ أَكْثَرَ اسْتِقْلَالِيَّةً وَتَنْظِيمًا، وَتَعَلَّمْتُ كَيْفَ أُدِيرُ وَقْتِي.</a:t>
@@ -9413,6 +9481,7 @@
                   <a:srgbClr val="1F2A37"/>
                 </a:solidFill>
                 <a:latin typeface="Amiri" pitchFamily="2" charset="-78"/>
+                <a:ea typeface="Amiri" pitchFamily="2" charset="-78"/>
                 <a:cs typeface="Amiri" pitchFamily="2" charset="-78"/>
               </a:rPr>
               <a:t>صَحِيحٌ أَنَّ لِكُلِّ نَوْعٍ مِنَ المَدَارِسِ عُيُوبَهُ، غَيْرَ أَنَّ المُهِمَّ أَنْ يَجِدَ الطَّالِبُ المَكَانَ الَّذِي يُنَاسِبُهُ. وَإِذَا حَقَّقْتُ أَحْلَامِي، فَسَأُصْبِحُ مُعَلِّمًا بِنَفْسِي، لِأَرُدَّ شَيْئًا مِمَّا أَعْطَتْنِي إِيَّاهُ المَدْرَسَةُ.</a:t>
@@ -9511,11 +9580,12 @@
               <a:buNone/>
             </a:pPr>
             <a:r>
-              <a:rPr lang="en-US" sz="950" b="1" dirty="0">
+              <a:rPr lang="ar-SA" sz="950" b="1" dirty="0">
                 <a:solidFill>
                   <a:srgbClr val="FFFFFF"/>
                 </a:solidFill>
                 <a:latin typeface="Calibri" pitchFamily="34" charset="0"/>
+                <a:ea typeface="Amiri" pitchFamily="2" charset="-78"/>
                 <a:cs typeface="Amiri" pitchFamily="2" charset="-78"/>
               </a:rPr>
               <a:t>يُقَالُ إِنَّ</a:t>
@@ -9576,11 +9646,12 @@
               <a:buNone/>
             </a:pPr>
             <a:r>
-              <a:rPr lang="en-US" sz="950" b="1" dirty="0">
+              <a:rPr lang="ar-SA" sz="950" b="1" dirty="0">
                 <a:solidFill>
                   <a:srgbClr val="FFFFFF"/>
                 </a:solidFill>
                 <a:latin typeface="Calibri" pitchFamily="34" charset="0"/>
+                <a:ea typeface="Amiri" pitchFamily="2" charset="-78"/>
                 <a:cs typeface="Amiri" pitchFamily="2" charset="-78"/>
               </a:rPr>
               <a:t>بِفَضْلِ مُعَلِّمَةٍ</a:t>
@@ -9641,11 +9712,12 @@
               <a:buNone/>
             </a:pPr>
             <a:r>
-              <a:rPr lang="en-US" sz="950" b="1" dirty="0">
+              <a:rPr lang="ar-SA" sz="950" b="1" dirty="0">
                 <a:solidFill>
                   <a:srgbClr val="FFFFFF"/>
                 </a:solidFill>
                 <a:latin typeface="Calibri" pitchFamily="34" charset="0"/>
+                <a:ea typeface="Amiri" pitchFamily="2" charset="-78"/>
                 <a:cs typeface="Amiri" pitchFamily="2" charset="-78"/>
               </a:rPr>
               <a:t>مَعَ أَنَّنِي … فَقَدْ</a:t>
@@ -9706,11 +9778,12 @@
               <a:buNone/>
             </a:pPr>
             <a:r>
-              <a:rPr lang="en-US" sz="950" b="1" dirty="0">
+              <a:rPr lang="ar-SA" sz="950" b="1" dirty="0">
                 <a:solidFill>
                   <a:srgbClr val="FFFFFF"/>
                 </a:solidFill>
                 <a:latin typeface="Calibri" pitchFamily="34" charset="0"/>
+                <a:ea typeface="Amiri" pitchFamily="2" charset="-78"/>
                 <a:cs typeface="Amiri" pitchFamily="2" charset="-78"/>
               </a:rPr>
               <a:t>إِذَا حَقَّقْتُ … فَسَأُصْبِحُ</a:t>
@@ -9844,6 +9917,7 @@
                   <a:srgbClr val="D4AF37"/>
                 </a:solidFill>
                 <a:latin typeface="Amiri" pitchFamily="2" charset="-78"/>
+                <a:ea typeface="Amiri" pitchFamily="2" charset="-78"/>
                 <a:cs typeface="Amiri" pitchFamily="2" charset="-78"/>
               </a:rPr>
               <a:t>م</a:t>
@@ -10101,6 +10175,7 @@
                   <a:srgbClr val="8A6D1E"/>
                 </a:solidFill>
                 <a:latin typeface="Amiri" pitchFamily="2" charset="-78"/>
+                <a:ea typeface="Amiri" pitchFamily="2" charset="-78"/>
                 <a:cs typeface="Amiri" pitchFamily="2" charset="-78"/>
               </a:rPr>
               <a:t>ب</a:t>
@@ -10165,6 +10240,7 @@
                   <a:srgbClr val="1B3B6F"/>
                 </a:solidFill>
                 <a:latin typeface="Amiri" pitchFamily="2" charset="-78"/>
+                <a:ea typeface="Amiri" pitchFamily="2" charset="-78"/>
                 <a:cs typeface="Amiri" pitchFamily="2" charset="-78"/>
               </a:rPr>
               <a:t>ب</a:t>
@@ -10216,6 +10292,7 @@
                   <a:srgbClr val="8A6D1E"/>
                 </a:solidFill>
                 <a:latin typeface="Amiri" pitchFamily="2" charset="-78"/>
+                <a:ea typeface="Amiri" pitchFamily="2" charset="-78"/>
                 <a:cs typeface="Amiri" pitchFamily="2" charset="-78"/>
               </a:rPr>
               <a:t>نَمُوذَجُ الإِجَابَةِ</a:t>
@@ -10329,6 +10406,7 @@
                   <a:srgbClr val="1F2A37"/>
                 </a:solidFill>
                 <a:latin typeface="Amiri" pitchFamily="2" charset="-78"/>
+                <a:ea typeface="Amiri" pitchFamily="2" charset="-78"/>
                 <a:cs typeface="Amiri" pitchFamily="2" charset="-78"/>
               </a:rPr>
               <a:t>يَخْتَلِفُ النَّاسُ كَثِيرًا حَوْلَ نَوْعِ المَدْرَسَةِ الأَفْضَلِ لِأَبْنَائِهِمْ: هَلْ هِيَ الحُكُومِيَّةُ المَجَّانِيَّةُ، أَمِ الخَاصَّةُ الغَالِيَةُ، أَمِ الإِلِكْتْرُونِيَّةُ الَّتِي انْتَشَرَتْ فِي السَّنَوَاتِ الأَخِيرَةِ؟</a:t>
@@ -10348,6 +10426,7 @@
                   <a:srgbClr val="1F2A37"/>
                 </a:solidFill>
                 <a:latin typeface="Amiri" pitchFamily="2" charset="-78"/>
+                <a:ea typeface="Amiri" pitchFamily="2" charset="-78"/>
                 <a:cs typeface="Amiri" pitchFamily="2" charset="-78"/>
               </a:rPr>
               <a:t>مِنْ نَاحِيَةٍ، تَتَمَيَّزُ المَدَارِسُ الخَاصَّةُ بِصُفُوفٍ أَصْغَرَ وَمَرَافِقَ أَحْدَثَ، مِمَّا يُتِيحُ لِلْمُعَلِّمِ أَنْ يَهْتَمَّ بِكُلِّ طَالِبٍ. وَمِنْ نَاحِيَةٍ أُخْرَى، تَجْمَعُ المَدَارِسُ الحُكُومِيَّةُ طُلَّابًا مِنْ خَلْفِيَّاتٍ مُخْتَلِفَةٍ، فَتُعَلِّمُهُمْ أَنْ يَعِيشُوا فِي مُجْتَمَعٍ حَقِيقِيٍّ مُتَنَوِّعٍ، وَأَنْ يَحْتَرِمُوا مَنْ يَخْتَلِفُ عَنْهُمْ.</a:t>
@@ -10367,6 +10446,7 @@
                   <a:srgbClr val="1F2A37"/>
                 </a:solidFill>
                 <a:latin typeface="Amiri" pitchFamily="2" charset="-78"/>
+                <a:ea typeface="Amiri" pitchFamily="2" charset="-78"/>
                 <a:cs typeface="Amiri" pitchFamily="2" charset="-78"/>
               </a:rPr>
               <a:t>وَقَدْ جَرَّبْتُ بِنَفْسِي نَوْعَيْنِ مِنَ التَّعْلِيمِ؛ فَبَعْدَ سَنَوَاتٍ فِي مَدْرَسَةٍ حُكُومِيَّةٍ مُزْدَحِمَةٍ، انْتَقَلْتُ إِلَى مَدْرَسَةٍ إِلِكْتْرُونِيَّةٍ، فَوَجَدْتُ فِيهَا مَوَادَّ لَمْ أَكُنْ أَحْلُمُ بِهَا، لٰكِنَّنِي اضْطُرِرْتُ إِلَى بِنَاءِ صَدَاقَاتِي خَارِجَ المَدْرَسَةِ، فِي النَّادِي الرِّيَاضِيِّ وَالمَسْجِدِ.</a:t>
@@ -10386,6 +10466,7 @@
                   <a:srgbClr val="1F2A37"/>
                 </a:solidFill>
                 <a:latin typeface="Amiri" pitchFamily="2" charset="-78"/>
+                <a:ea typeface="Amiri" pitchFamily="2" charset="-78"/>
                 <a:cs typeface="Amiri" pitchFamily="2" charset="-78"/>
               </a:rPr>
               <a:t>صَحِيحٌ أَنَّ المَالَ يَشْتَرِي مَرَافِقَ أَفْضَلَ، غَيْرَ أَنَّهُ لَا يَشْتَرِي مُعَلِّمًا مُلْهِمًا أَوْ طَالِبًا مُتَحَمِّسًا. وَلَوْ حَصَلَتْ كُلُّ المَدَارِسِ الحُكُومِيَّةِ عَلَى دَعْمٍ كَافٍ، لَمَا احْتَاجَتِ الأُسَرُ إِلَى دَفْعِ مَبَالِغَ ضَخْمَةٍ مِنْ أَجْلِ تَعْلِيمٍ جَيِّدٍ، وَلَحَصَلَ كُلُّ طِفْلٍ عَلَى فُرْصَةٍ عَادِلَةٍ.</a:t>
@@ -10484,11 +10565,12 @@
               <a:buNone/>
             </a:pPr>
             <a:r>
-              <a:rPr lang="en-US" sz="950" b="1" dirty="0">
+              <a:rPr lang="ar-SA" sz="950" b="1" dirty="0">
                 <a:solidFill>
                   <a:srgbClr val="FFFFFF"/>
                 </a:solidFill>
                 <a:latin typeface="Calibri" pitchFamily="34" charset="0"/>
+                <a:ea typeface="Amiri" pitchFamily="2" charset="-78"/>
                 <a:cs typeface="Amiri" pitchFamily="2" charset="-78"/>
               </a:rPr>
               <a:t>تَتَمَيَّزُ … بِصُفُوفٍ</a:t>
@@ -10549,11 +10631,12 @@
               <a:buNone/>
             </a:pPr>
             <a:r>
-              <a:rPr lang="en-US" sz="950" b="1" dirty="0">
+              <a:rPr lang="ar-SA" sz="950" b="1" dirty="0">
                 <a:solidFill>
                   <a:srgbClr val="FFFFFF"/>
                 </a:solidFill>
                 <a:latin typeface="Calibri" pitchFamily="34" charset="0"/>
+                <a:ea typeface="Amiri" pitchFamily="2" charset="-78"/>
                 <a:cs typeface="Amiri" pitchFamily="2" charset="-78"/>
               </a:rPr>
               <a:t>مِمَّا يُتِيحُ</a:t>
@@ -10614,11 +10697,12 @@
               <a:buNone/>
             </a:pPr>
             <a:r>
-              <a:rPr lang="en-US" sz="950" b="1" dirty="0">
+              <a:rPr lang="ar-SA" sz="950" b="1" dirty="0">
                 <a:solidFill>
                   <a:srgbClr val="FFFFFF"/>
                 </a:solidFill>
                 <a:latin typeface="Calibri" pitchFamily="34" charset="0"/>
+                <a:ea typeface="Amiri" pitchFamily="2" charset="-78"/>
                 <a:cs typeface="Amiri" pitchFamily="2" charset="-78"/>
               </a:rPr>
               <a:t>لَمْ أَكُنْ أَحْلُمُ بِهَا</a:t>
@@ -10679,11 +10763,12 @@
               <a:buNone/>
             </a:pPr>
             <a:r>
-              <a:rPr lang="en-US" sz="950" b="1" dirty="0">
+              <a:rPr lang="ar-SA" sz="950" b="1" dirty="0">
                 <a:solidFill>
                   <a:srgbClr val="FFFFFF"/>
                 </a:solidFill>
                 <a:latin typeface="Calibri" pitchFamily="34" charset="0"/>
+                <a:ea typeface="Amiri" pitchFamily="2" charset="-78"/>
                 <a:cs typeface="Amiri" pitchFamily="2" charset="-78"/>
               </a:rPr>
               <a:t>لَوْ حَصَلَتْ … لَمَا احْتَاجَتْ</a:t>
@@ -10817,6 +10902,7 @@
                   <a:srgbClr val="D4AF37"/>
                 </a:solidFill>
                 <a:latin typeface="Amiri" pitchFamily="2" charset="-78"/>
+                <a:ea typeface="Amiri" pitchFamily="2" charset="-78"/>
                 <a:cs typeface="Amiri" pitchFamily="2" charset="-78"/>
               </a:rPr>
               <a:t>م</a:t>
@@ -11137,6 +11223,7 @@
                   <a:srgbClr val="8A6D1E"/>
                 </a:solidFill>
                 <a:latin typeface="Amiri" pitchFamily="2" charset="-78"/>
+                <a:ea typeface="Amiri" pitchFamily="2" charset="-78"/>
                 <a:cs typeface="Amiri" pitchFamily="2" charset="-78"/>
               </a:rPr>
               <a:t>قَيِّمْ عَمَلَكَ</a:t>
@@ -12381,6 +12468,7 @@
                   <a:srgbClr val="FFFFFF"/>
                 </a:solidFill>
                 <a:latin typeface="Amiri" pitchFamily="2" charset="-78"/>
+                <a:ea typeface="Amiri" pitchFamily="2" charset="-78"/>
                 <a:cs typeface="Amiri" pitchFamily="2" charset="-78"/>
               </a:rPr>
               <a:t>أَحْسَنْتُمْ! إِلَى اللِّقَاءِ</a:t>
@@ -12533,6 +12621,7 @@
                   <a:srgbClr val="D4AF37"/>
                 </a:solidFill>
                 <a:latin typeface="Amiri" pitchFamily="2" charset="-78"/>
+                <a:ea typeface="Amiri" pitchFamily="2" charset="-78"/>
                 <a:cs typeface="Amiri" pitchFamily="2" charset="-78"/>
               </a:rPr>
               <a:t>وَرْشَةُ التَّدْرِيبِ</a:t>
@@ -12666,6 +12755,7 @@
                   <a:srgbClr val="D4AF37"/>
                 </a:solidFill>
                 <a:latin typeface="Amiri" pitchFamily="2" charset="-78"/>
+                <a:ea typeface="Amiri" pitchFamily="2" charset="-78"/>
                 <a:cs typeface="Amiri" pitchFamily="2" charset="-78"/>
               </a:rPr>
               <a:t>م</a:t>
@@ -12986,6 +13076,7 @@
                   <a:srgbClr val="8A6D1E"/>
                 </a:solidFill>
                 <a:latin typeface="Amiri" pitchFamily="2" charset="-78"/>
+                <a:ea typeface="Amiri" pitchFamily="2" charset="-78"/>
                 <a:cs typeface="Amiri" pitchFamily="2" charset="-78"/>
               </a:rPr>
               <a:t>آدَابُ الصَّفِّ</a:t>
@@ -14517,6 +14608,7 @@
                   <a:srgbClr val="D4AF37"/>
                 </a:solidFill>
                 <a:latin typeface="Amiri" pitchFamily="2" charset="-78"/>
+                <a:ea typeface="Amiri" pitchFamily="2" charset="-78"/>
                 <a:cs typeface="Amiri" pitchFamily="2" charset="-78"/>
               </a:rPr>
               <a:t>م</a:t>
@@ -14837,6 +14929,7 @@
                   <a:srgbClr val="8A6D1E"/>
                 </a:solidFill>
                 <a:latin typeface="Amiri" pitchFamily="2" charset="-78"/>
+                <a:ea typeface="Amiri" pitchFamily="2" charset="-78"/>
                 <a:cs typeface="Amiri" pitchFamily="2" charset="-78"/>
               </a:rPr>
               <a:t>خَرِيطَةُ الوَرْشَةِ</a:t>
@@ -15151,6 +15244,7 @@
                   <a:srgbClr val="1B3B6F"/>
                 </a:solidFill>
                 <a:latin typeface="Amiri" pitchFamily="2" charset="-78"/>
+                <a:ea typeface="Amiri" pitchFamily="2" charset="-78"/>
                 <a:cs typeface="Amiri" pitchFamily="2" charset="-78"/>
               </a:rPr>
               <a:t>كَيْفَ</a:t>
@@ -15427,6 +15521,7 @@
                   <a:srgbClr val="1E6B52"/>
                 </a:solidFill>
                 <a:latin typeface="Amiri" pitchFamily="2" charset="-78"/>
+                <a:ea typeface="Amiri" pitchFamily="2" charset="-78"/>
                 <a:cs typeface="Amiri" pitchFamily="2" charset="-78"/>
               </a:rPr>
               <a:t>الاسْتِمَارَةُ</a:t>
@@ -15703,6 +15798,7 @@
                   <a:srgbClr val="1E6B52"/>
                 </a:solidFill>
                 <a:latin typeface="Amiri" pitchFamily="2" charset="-78"/>
+                <a:ea typeface="Amiri" pitchFamily="2" charset="-78"/>
                 <a:cs typeface="Amiri" pitchFamily="2" charset="-78"/>
               </a:rPr>
               <a:t>الرِّسَالَةُ</a:t>
@@ -15979,6 +16075,7 @@
                   <a:srgbClr val="1E6B52"/>
                 </a:solidFill>
                 <a:latin typeface="Amiri" pitchFamily="2" charset="-78"/>
+                <a:ea typeface="Amiri" pitchFamily="2" charset="-78"/>
                 <a:cs typeface="Amiri" pitchFamily="2" charset="-78"/>
               </a:rPr>
               <a:t>المَقَالُ</a:t>
@@ -16255,6 +16352,7 @@
                   <a:srgbClr val="8A6D1E"/>
                 </a:solidFill>
                 <a:latin typeface="Amiri" pitchFamily="2" charset="-78"/>
+                <a:ea typeface="Amiri" pitchFamily="2" charset="-78"/>
                 <a:cs typeface="Amiri" pitchFamily="2" charset="-78"/>
               </a:rPr>
               <a:t>قَيِّمْ</a:t>
@@ -16498,6 +16596,7 @@
                   <a:srgbClr val="D4AF37"/>
                 </a:solidFill>
                 <a:latin typeface="Amiri" pitchFamily="2" charset="-78"/>
+                <a:ea typeface="Amiri" pitchFamily="2" charset="-78"/>
                 <a:cs typeface="Amiri" pitchFamily="2" charset="-78"/>
               </a:rPr>
               <a:t>م</a:t>
@@ -16818,6 +16917,7 @@
                   <a:srgbClr val="8A6D1E"/>
                 </a:solidFill>
                 <a:latin typeface="Amiri" pitchFamily="2" charset="-78"/>
+                <a:ea typeface="Amiri" pitchFamily="2" charset="-78"/>
                 <a:cs typeface="Amiri" pitchFamily="2" charset="-78"/>
               </a:rPr>
               <a:t>امْتِحَانُ الكِتَابَةِ</a:t>
@@ -17442,6 +17542,7 @@
                   <a:srgbClr val="1B3B6F"/>
                 </a:solidFill>
                 <a:latin typeface="Amiri" pitchFamily="2" charset="-78"/>
+                <a:ea typeface="Amiri" pitchFamily="2" charset="-78"/>
                 <a:cs typeface="Amiri" pitchFamily="2" charset="-78"/>
               </a:rPr>
               <a:t>مَدْرَسَةٌ ثَانَوِيَّةٌ حُكُومِيَّةٌ مُخْتَلَطَةٌ</a:t>
@@ -17541,6 +17642,7 @@
                   <a:srgbClr val="1B3B6F"/>
                 </a:solidFill>
                 <a:latin typeface="Amiri" pitchFamily="2" charset="-78"/>
+                <a:ea typeface="Amiri" pitchFamily="2" charset="-78"/>
                 <a:cs typeface="Amiri" pitchFamily="2" charset="-78"/>
               </a:rPr>
               <a:t>عَلَى عَكْسِ مَدْرَسَتِي الابْتِدَائِيَّةِ</a:t>
@@ -17640,6 +17742,7 @@
                   <a:srgbClr val="1B3B6F"/>
                 </a:solidFill>
                 <a:latin typeface="Amiri" pitchFamily="2" charset="-78"/>
+                <a:ea typeface="Amiri" pitchFamily="2" charset="-78"/>
                 <a:cs typeface="Amiri" pitchFamily="2" charset="-78"/>
               </a:rPr>
               <a:t>المَدْرَسَةُ الثَّانَوِيَّةُ أَصْعَبُ مِنَ الابْتِدَائِيَّةِ</a:t>
@@ -17811,6 +17914,7 @@
                   <a:srgbClr val="D4AF37"/>
                 </a:solidFill>
                 <a:latin typeface="Amiri" pitchFamily="2" charset="-78"/>
+                <a:ea typeface="Amiri" pitchFamily="2" charset="-78"/>
                 <a:cs typeface="Amiri" pitchFamily="2" charset="-78"/>
               </a:rPr>
               <a:t>م</a:t>
@@ -18131,6 +18235,7 @@
                   <a:srgbClr val="8A6D1E"/>
                 </a:solidFill>
                 <a:latin typeface="Amiri" pitchFamily="2" charset="-78"/>
+                <a:ea typeface="Amiri" pitchFamily="2" charset="-78"/>
                 <a:cs typeface="Amiri" pitchFamily="2" charset="-78"/>
               </a:rPr>
               <a:t>اسْتِمَارَةُ تَسْجِيلِ طَالِبٍ جَدِيدٍ</a:t>
@@ -18487,6 +18592,7 @@
                   <a:srgbClr val="1B3B6F"/>
                 </a:solidFill>
                 <a:latin typeface="Amiri" pitchFamily="2" charset="-78"/>
+                <a:ea typeface="Amiri" pitchFamily="2" charset="-78"/>
                 <a:cs typeface="Amiri" pitchFamily="2" charset="-78"/>
               </a:rPr>
               <a:t>الاسْمُ الكَامِلُ</a:t>
@@ -18731,6 +18837,7 @@
                   <a:srgbClr val="1B3B6F"/>
                 </a:solidFill>
                 <a:latin typeface="Amiri" pitchFamily="2" charset="-78"/>
+                <a:ea typeface="Amiri" pitchFamily="2" charset="-78"/>
                 <a:cs typeface="Amiri" pitchFamily="2" charset="-78"/>
               </a:rPr>
               <a:t>تَارِيخُ المِيلَادِ</a:t>
@@ -18975,6 +19082,7 @@
                   <a:srgbClr val="1B3B6F"/>
                 </a:solidFill>
                 <a:latin typeface="Amiri" pitchFamily="2" charset="-78"/>
+                <a:ea typeface="Amiri" pitchFamily="2" charset="-78"/>
                 <a:cs typeface="Amiri" pitchFamily="2" charset="-78"/>
               </a:rPr>
               <a:t>الصَّفُّ</a:t>
@@ -19219,6 +19327,7 @@
                   <a:srgbClr val="1B3B6F"/>
                 </a:solidFill>
                 <a:latin typeface="Amiri" pitchFamily="2" charset="-78"/>
+                <a:ea typeface="Amiri" pitchFamily="2" charset="-78"/>
                 <a:cs typeface="Amiri" pitchFamily="2" charset="-78"/>
               </a:rPr>
               <a:t>المَدْرَسَةُ السَّابِقَةُ</a:t>
@@ -19463,6 +19572,7 @@
                   <a:srgbClr val="1B3B6F"/>
                 </a:solidFill>
                 <a:latin typeface="Amiri" pitchFamily="2" charset="-78"/>
+                <a:ea typeface="Amiri" pitchFamily="2" charset="-78"/>
                 <a:cs typeface="Amiri" pitchFamily="2" charset="-78"/>
               </a:rPr>
               <a:t>نَوْعُ المَدْرَسَةِ السَّابِقَةِ</a:t>
@@ -19707,6 +19817,7 @@
                   <a:srgbClr val="1B3B6F"/>
                 </a:solidFill>
                 <a:latin typeface="Amiri" pitchFamily="2" charset="-78"/>
+                <a:ea typeface="Amiri" pitchFamily="2" charset="-78"/>
                 <a:cs typeface="Amiri" pitchFamily="2" charset="-78"/>
               </a:rPr>
               <a:t>المَادَّةُ المُفَضَّلَةُ</a:t>
@@ -19951,6 +20062,7 @@
                   <a:srgbClr val="1B3B6F"/>
                 </a:solidFill>
                 <a:latin typeface="Amiri" pitchFamily="2" charset="-78"/>
+                <a:ea typeface="Amiri" pitchFamily="2" charset="-78"/>
                 <a:cs typeface="Amiri" pitchFamily="2" charset="-78"/>
               </a:rPr>
               <a:t>نَشَاطٌ تُرِيدُ أَنْ تُشَارِكَ فِيهِ</a:t>
@@ -20130,6 +20242,7 @@
                   <a:srgbClr val="1B3B6F"/>
                 </a:solidFill>
                 <a:latin typeface="Amiri" pitchFamily="2" charset="-78"/>
+                <a:ea typeface="Amiri" pitchFamily="2" charset="-78"/>
                 <a:cs typeface="Amiri" pitchFamily="2" charset="-78"/>
               </a:rPr>
               <a:t>جُمْلَةٌ: لِمَاذَا اخْتَرْتَ مَدْرَسَتَنَا؟</a:t>
@@ -20339,6 +20452,7 @@
                   <a:srgbClr val="D4AF37"/>
                 </a:solidFill>
                 <a:latin typeface="Amiri" pitchFamily="2" charset="-78"/>
+                <a:ea typeface="Amiri" pitchFamily="2" charset="-78"/>
                 <a:cs typeface="Amiri" pitchFamily="2" charset="-78"/>
               </a:rPr>
               <a:t>م</a:t>
@@ -20659,6 +20773,7 @@
                   <a:srgbClr val="8A6D1E"/>
                 </a:solidFill>
                 <a:latin typeface="Amiri" pitchFamily="2" charset="-78"/>
+                <a:ea typeface="Amiri" pitchFamily="2" charset="-78"/>
                 <a:cs typeface="Amiri" pitchFamily="2" charset="-78"/>
               </a:rPr>
               <a:t>نَمُوذَجُ الإِجَابَةِ</a:t>
@@ -20977,6 +21092,7 @@
                   <a:srgbClr val="1B3B6F"/>
                 </a:solidFill>
                 <a:latin typeface="Amiri" pitchFamily="2" charset="-78"/>
+                <a:ea typeface="Amiri" pitchFamily="2" charset="-78"/>
                 <a:cs typeface="Amiri" pitchFamily="2" charset="-78"/>
               </a:rPr>
               <a:t>عُمَرُ خَالِدٌ</a:t>
@@ -21015,6 +21131,7 @@
                   <a:srgbClr val="1B3B6F"/>
                 </a:solidFill>
                 <a:latin typeface="Amiri" pitchFamily="2" charset="-78"/>
+                <a:ea typeface="Amiri" pitchFamily="2" charset="-78"/>
                 <a:cs typeface="Amiri" pitchFamily="2" charset="-78"/>
               </a:rPr>
               <a:t>الاسْمُ الكَامِلُ</a:t>
@@ -21156,6 +21273,7 @@
                   <a:srgbClr val="1B3B6F"/>
                 </a:solidFill>
                 <a:latin typeface="Amiri" pitchFamily="2" charset="-78"/>
+                <a:ea typeface="Amiri" pitchFamily="2" charset="-78"/>
                 <a:cs typeface="Amiri" pitchFamily="2" charset="-78"/>
               </a:rPr>
               <a:t>٤ فِبْرَايِر ٢٠٠٩</a:t>
@@ -21194,6 +21312,7 @@
                   <a:srgbClr val="1B3B6F"/>
                 </a:solidFill>
                 <a:latin typeface="Amiri" pitchFamily="2" charset="-78"/>
+                <a:ea typeface="Amiri" pitchFamily="2" charset="-78"/>
                 <a:cs typeface="Amiri" pitchFamily="2" charset="-78"/>
               </a:rPr>
               <a:t>تَارِيخُ المِيلَادِ</a:t>
@@ -21335,6 +21454,7 @@
                   <a:srgbClr val="1B3B6F"/>
                 </a:solidFill>
                 <a:latin typeface="Amiri" pitchFamily="2" charset="-78"/>
+                <a:ea typeface="Amiri" pitchFamily="2" charset="-78"/>
                 <a:cs typeface="Amiri" pitchFamily="2" charset="-78"/>
               </a:rPr>
               <a:t>الصَّفُّ العَاشِرُ</a:t>
@@ -21373,6 +21493,7 @@
                   <a:srgbClr val="1B3B6F"/>
                 </a:solidFill>
                 <a:latin typeface="Amiri" pitchFamily="2" charset="-78"/>
+                <a:ea typeface="Amiri" pitchFamily="2" charset="-78"/>
                 <a:cs typeface="Amiri" pitchFamily="2" charset="-78"/>
               </a:rPr>
               <a:t>الصَّفُّ</a:t>
@@ -21514,6 +21635,7 @@
                   <a:srgbClr val="1B3B6F"/>
                 </a:solidFill>
                 <a:latin typeface="Amiri" pitchFamily="2" charset="-78"/>
+                <a:ea typeface="Amiri" pitchFamily="2" charset="-78"/>
                 <a:cs typeface="Amiri" pitchFamily="2" charset="-78"/>
               </a:rPr>
               <a:t>مَدْرَسَةُ النُّورِ</a:t>
@@ -21552,6 +21674,7 @@
                   <a:srgbClr val="1B3B6F"/>
                 </a:solidFill>
                 <a:latin typeface="Amiri" pitchFamily="2" charset="-78"/>
+                <a:ea typeface="Amiri" pitchFamily="2" charset="-78"/>
                 <a:cs typeface="Amiri" pitchFamily="2" charset="-78"/>
               </a:rPr>
               <a:t>المَدْرَسَةُ السَّابِقَةُ</a:t>
@@ -21693,6 +21816,7 @@
                   <a:srgbClr val="1B3B6F"/>
                 </a:solidFill>
                 <a:latin typeface="Amiri" pitchFamily="2" charset="-78"/>
+                <a:ea typeface="Amiri" pitchFamily="2" charset="-78"/>
                 <a:cs typeface="Amiri" pitchFamily="2" charset="-78"/>
               </a:rPr>
               <a:t>حُكُومِيَّةٌ مُخْتَلَطَةٌ</a:t>
@@ -21731,6 +21855,7 @@
                   <a:srgbClr val="1B3B6F"/>
                 </a:solidFill>
                 <a:latin typeface="Amiri" pitchFamily="2" charset="-78"/>
+                <a:ea typeface="Amiri" pitchFamily="2" charset="-78"/>
                 <a:cs typeface="Amiri" pitchFamily="2" charset="-78"/>
               </a:rPr>
               <a:t>نَوْعُ المَدْرَسَةِ السَّابِقَةِ</a:t>
@@ -21872,6 +21997,7 @@
                   <a:srgbClr val="1B3B6F"/>
                 </a:solidFill>
                 <a:latin typeface="Amiri" pitchFamily="2" charset="-78"/>
+                <a:ea typeface="Amiri" pitchFamily="2" charset="-78"/>
                 <a:cs typeface="Amiri" pitchFamily="2" charset="-78"/>
               </a:rPr>
               <a:t>العُلُومُ</a:t>
@@ -21910,6 +22036,7 @@
                   <a:srgbClr val="1B3B6F"/>
                 </a:solidFill>
                 <a:latin typeface="Amiri" pitchFamily="2" charset="-78"/>
+                <a:ea typeface="Amiri" pitchFamily="2" charset="-78"/>
                 <a:cs typeface="Amiri" pitchFamily="2" charset="-78"/>
               </a:rPr>
               <a:t>المَادَّةُ المُفَضَّلَةُ</a:t>
@@ -22051,6 +22178,7 @@
                   <a:srgbClr val="1B3B6F"/>
                 </a:solidFill>
                 <a:latin typeface="Amiri" pitchFamily="2" charset="-78"/>
+                <a:ea typeface="Amiri" pitchFamily="2" charset="-78"/>
                 <a:cs typeface="Amiri" pitchFamily="2" charset="-78"/>
               </a:rPr>
               <a:t>نَادِي المُنَاظَرَاتِ</a:t>
@@ -22089,6 +22217,7 @@
                   <a:srgbClr val="1B3B6F"/>
                 </a:solidFill>
                 <a:latin typeface="Amiri" pitchFamily="2" charset="-78"/>
+                <a:ea typeface="Amiri" pitchFamily="2" charset="-78"/>
                 <a:cs typeface="Amiri" pitchFamily="2" charset="-78"/>
               </a:rPr>
               <a:t>نَشَاطٌ تُرِيدُ أَنْ تُشَارِكَ فِيهِ</a:t>
@@ -22230,6 +22359,7 @@
                   <a:srgbClr val="1B3B6F"/>
                 </a:solidFill>
                 <a:latin typeface="Amiri" pitchFamily="2" charset="-78"/>
+                <a:ea typeface="Amiri" pitchFamily="2" charset="-78"/>
                 <a:cs typeface="Amiri" pitchFamily="2" charset="-78"/>
               </a:rPr>
               <a:t>اخْتَرْتُ مَدْرَسَتَكُمْ لِأَنَّ مُخْتَبَرَاتِهَا أَحْدَثُ مِنْ مُخْتَبَرَاتِ مَدْرَسَتِي السَّابِقَةِ.</a:t>
@@ -22268,6 +22398,7 @@
                   <a:srgbClr val="1B3B6F"/>
                 </a:solidFill>
                 <a:latin typeface="Amiri" pitchFamily="2" charset="-78"/>
+                <a:ea typeface="Amiri" pitchFamily="2" charset="-78"/>
                 <a:cs typeface="Amiri" pitchFamily="2" charset="-78"/>
               </a:rPr>
               <a:t>جُمْلَةٌ: لِمَاذَا اخْتَرْتَ مَدْرَسَتَنَا؟</a:t>
@@ -22477,6 +22608,7 @@
                   <a:srgbClr val="D4AF37"/>
                 </a:solidFill>
                 <a:latin typeface="Amiri" pitchFamily="2" charset="-78"/>
+                <a:ea typeface="Amiri" pitchFamily="2" charset="-78"/>
                 <a:cs typeface="Amiri" pitchFamily="2" charset="-78"/>
               </a:rPr>
               <a:t>م</a:t>
@@ -22797,6 +22929,7 @@
                   <a:srgbClr val="8A6D1E"/>
                 </a:solidFill>
                 <a:latin typeface="Amiri" pitchFamily="2" charset="-78"/>
+                <a:ea typeface="Amiri" pitchFamily="2" charset="-78"/>
                 <a:cs typeface="Amiri" pitchFamily="2" charset="-78"/>
               </a:rPr>
               <a:t>مَدْرَسَتِي الجَدِيدَةُ</a:t>
@@ -23272,6 +23405,7 @@
                   <a:srgbClr val="1B3B6F"/>
                 </a:solidFill>
                 <a:latin typeface="Amiri" pitchFamily="2" charset="-78"/>
+                <a:ea typeface="Amiri" pitchFamily="2" charset="-78"/>
                 <a:cs typeface="Amiri" pitchFamily="2" charset="-78"/>
               </a:rPr>
               <a:t>هِيَ مَدْرَسَةٌ … وَفِيهَا …</a:t>
@@ -23348,6 +23482,7 @@
                   <a:srgbClr val="1B3B6F"/>
                 </a:solidFill>
                 <a:latin typeface="Amiri" pitchFamily="2" charset="-78"/>
+                <a:ea typeface="Amiri" pitchFamily="2" charset="-78"/>
                 <a:cs typeface="Amiri" pitchFamily="2" charset="-78"/>
               </a:rPr>
               <a:t>مَدْرَسَتِي القَدِيمَةُ كَانَتْ … أَمَّا الآنَ فَأَرْكَبُ …</a:t>
@@ -23424,6 +23559,7 @@
                   <a:srgbClr val="1B3B6F"/>
                 </a:solidFill>
                 <a:latin typeface="Amiri" pitchFamily="2" charset="-78"/>
+                <a:ea typeface="Amiri" pitchFamily="2" charset="-78"/>
                 <a:cs typeface="Amiri" pitchFamily="2" charset="-78"/>
               </a:rPr>
               <a:t>مَدْرَسَتِي الجَدِيدَةُ أَفْضَلُ، لِأَنَّ …</a:t>
@@ -23500,6 +23636,7 @@
                   <a:srgbClr val="1B3B6F"/>
                 </a:solidFill>
                 <a:latin typeface="Amiri" pitchFamily="2" charset="-78"/>
+                <a:ea typeface="Amiri" pitchFamily="2" charset="-78"/>
                 <a:cs typeface="Amiri" pitchFamily="2" charset="-78"/>
               </a:rPr>
               <a:t>بَعْدَ المَدْرَسَةِ سَأَدْرُسُ …</a:t>
@@ -23671,6 +23808,7 @@
                   <a:srgbClr val="D4AF37"/>
                 </a:solidFill>
                 <a:latin typeface="Amiri" pitchFamily="2" charset="-78"/>
+                <a:ea typeface="Amiri" pitchFamily="2" charset="-78"/>
                 <a:cs typeface="Amiri" pitchFamily="2" charset="-78"/>
               </a:rPr>
               <a:t>م</a:t>
@@ -23991,6 +24129,7 @@
                   <a:srgbClr val="8A6D1E"/>
                 </a:solidFill>
                 <a:latin typeface="Amiri" pitchFamily="2" charset="-78"/>
+                <a:ea typeface="Amiri" pitchFamily="2" charset="-78"/>
                 <a:cs typeface="Amiri" pitchFamily="2" charset="-78"/>
               </a:rPr>
               <a:t>نَصُّ السُّؤَالِ</a:t>
@@ -24271,6 +24410,7 @@
                   <a:srgbClr val="1B3B6F"/>
                 </a:solidFill>
                 <a:latin typeface="Amiri" pitchFamily="2" charset="-78"/>
+                <a:ea typeface="Amiri" pitchFamily="2" charset="-78"/>
                 <a:cs typeface="Amiri" pitchFamily="2" charset="-78"/>
               </a:rPr>
               <a:t>انْتَقَلْتَ إِلَى مَدْرَسَةٍ جَدِيدَةٍ. اكْتُبْ رِسَالَةً إِلَى صَدِيقِكَ (٨٠–٩٠ كَلِمَةً).</a:t>
@@ -24412,6 +24552,7 @@
                   <a:srgbClr val="1B3B6F"/>
                 </a:solidFill>
                 <a:latin typeface="Amiri" pitchFamily="2" charset="-78"/>
+                <a:ea typeface="Amiri" pitchFamily="2" charset="-78"/>
                 <a:cs typeface="Amiri" pitchFamily="2" charset="-78"/>
               </a:rPr>
               <a:t>كَيْفَ مَدْرَسَتُكَ الجَدِيدَةُ؟</a:t>
@@ -24553,6 +24694,7 @@
                   <a:srgbClr val="1B3B6F"/>
                 </a:solidFill>
                 <a:latin typeface="Amiri" pitchFamily="2" charset="-78"/>
+                <a:ea typeface="Amiri" pitchFamily="2" charset="-78"/>
                 <a:cs typeface="Amiri" pitchFamily="2" charset="-78"/>
               </a:rPr>
               <a:t>مَا الفَرْقُ بَيْنَهَا وَبَيْنَ مَدْرَسَتِكَ القَدِيمَةِ؟</a:t>
@@ -24694,6 +24836,7 @@
                   <a:srgbClr val="1B3B6F"/>
                 </a:solidFill>
                 <a:latin typeface="Amiri" pitchFamily="2" charset="-78"/>
+                <a:ea typeface="Amiri" pitchFamily="2" charset="-78"/>
                 <a:cs typeface="Amiri" pitchFamily="2" charset="-78"/>
               </a:rPr>
               <a:t>مَا رَأْيُكَ؟ وَلِمَاذَا؟</a:t>
@@ -24835,6 +24978,7 @@
                   <a:srgbClr val="1B3B6F"/>
                 </a:solidFill>
                 <a:latin typeface="Amiri" pitchFamily="2" charset="-78"/>
+                <a:ea typeface="Amiri" pitchFamily="2" charset="-78"/>
                 <a:cs typeface="Amiri" pitchFamily="2" charset="-78"/>
               </a:rPr>
               <a:t>مَاذَا سَتَفْعَلُ بَعْدَ المَدْرَسَةِ؟</a:t>
@@ -25044,6 +25188,7 @@
                   <a:srgbClr val="D4AF37"/>
                 </a:solidFill>
                 <a:latin typeface="Amiri" pitchFamily="2" charset="-78"/>
+                <a:ea typeface="Amiri" pitchFamily="2" charset="-78"/>
                 <a:cs typeface="Amiri" pitchFamily="2" charset="-78"/>
               </a:rPr>
               <a:t>م</a:t>
@@ -25364,6 +25509,7 @@
                   <a:srgbClr val="8A6D1E"/>
                 </a:solidFill>
                 <a:latin typeface="Amiri" pitchFamily="2" charset="-78"/>
+                <a:ea typeface="Amiri" pitchFamily="2" charset="-78"/>
                 <a:cs typeface="Amiri" pitchFamily="2" charset="-78"/>
               </a:rPr>
               <a:t>قَوَالِبُ الكِتَابَةِ</a:t>
@@ -25644,6 +25790,7 @@
                   <a:srgbClr val="1B3B6F"/>
                 </a:solidFill>
                 <a:latin typeface="Amiri" pitchFamily="2" charset="-78"/>
+                <a:ea typeface="Amiri" pitchFamily="2" charset="-78"/>
                 <a:cs typeface="Amiri" pitchFamily="2" charset="-78"/>
               </a:rPr>
               <a:t>مَرْحَبًا يَا ______ ، كَيْفَ حَالُكَ؟</a:t>
@@ -25850,6 +25997,7 @@
                   <a:srgbClr val="1B3B6F"/>
                 </a:solidFill>
                 <a:latin typeface="Amiri" pitchFamily="2" charset="-78"/>
+                <a:ea typeface="Amiri" pitchFamily="2" charset="-78"/>
                 <a:cs typeface="Amiri" pitchFamily="2" charset="-78"/>
               </a:rPr>
               <a:t>مَدْرَسَتِي الجَدِيدَةُ ______ ، وَفِيهَا ______ .</a:t>
@@ -26056,6 +26204,7 @@
                   <a:srgbClr val="1B3B6F"/>
                 </a:solidFill>
                 <a:latin typeface="Amiri" pitchFamily="2" charset="-78"/>
+                <a:ea typeface="Amiri" pitchFamily="2" charset="-78"/>
                 <a:cs typeface="Amiri" pitchFamily="2" charset="-78"/>
               </a:rPr>
               <a:t>مَدْرَسَتِي القَدِيمَةُ كَانَتْ ______ ، أَمَّا الآنَ فَأَ______ .</a:t>
@@ -26262,6 +26411,7 @@
                   <a:srgbClr val="1B3B6F"/>
                 </a:solidFill>
                 <a:latin typeface="Amiri" pitchFamily="2" charset="-78"/>
+                <a:ea typeface="Amiri" pitchFamily="2" charset="-78"/>
                 <a:cs typeface="Amiri" pitchFamily="2" charset="-78"/>
               </a:rPr>
               <a:t>فِي رَأْيِي، مَدْرَسَتِي الجَدِيدَةُ أَفْضَلُ، لِأَنَّ ______ .</a:t>
@@ -26468,6 +26618,7 @@
                   <a:srgbClr val="1B3B6F"/>
                 </a:solidFill>
                 <a:latin typeface="Amiri" pitchFamily="2" charset="-78"/>
+                <a:ea typeface="Amiri" pitchFamily="2" charset="-78"/>
                 <a:cs typeface="Amiri" pitchFamily="2" charset="-78"/>
               </a:rPr>
               <a:t>بَعْدَ المَدْرَسَةِ سَأَدْرُسُ ______ .</a:t>
@@ -26674,6 +26825,7 @@
                   <a:srgbClr val="1B3B6F"/>
                 </a:solidFill>
                 <a:latin typeface="Amiri" pitchFamily="2" charset="-78"/>
+                <a:ea typeface="Amiri" pitchFamily="2" charset="-78"/>
                 <a:cs typeface="Amiri" pitchFamily="2" charset="-78"/>
               </a:rPr>
               <a:t>إِلَى اللِّقَاءِ، ______</a:t>
@@ -26913,13 +27065,9 @@
     <a:fontScheme name="Office">
       <a:majorFont>
         <a:latin typeface="Calibri Light" panose="020F0302020204030204"/>
-        <a:ea typeface=""/>
-        <a:cs typeface=""/>
-        <a:font script="Jpan" typeface="游ゴシック Light"/>
-        <a:font script="Hang" typeface="맑은 고딕"/>
-        <a:font script="Hans" typeface="等线 Light"/>
-        <a:font script="Hant" typeface="新細明體"/>
-        <a:font script="Arab" typeface="Times New Roman"/>
+        <a:ea typeface="Amiri" pitchFamily="2" charset="-78"/>
+        <a:cs typeface="Amiri" pitchFamily="2" charset="-78"/>
+        <a:font script="Arab" typeface="Amiri"/>
         <a:font script="Hebr" typeface="Times New Roman"/>
         <a:font script="Thai" typeface="Angsana New"/>
         <a:font script="Ethi" typeface="Nyala"/>
@@ -26965,13 +27113,9 @@
       </a:majorFont>
       <a:minorFont>
         <a:latin typeface="Calibri" panose="020F0502020204030204"/>
-        <a:ea typeface=""/>
-        <a:cs typeface=""/>
-        <a:font script="Jpan" typeface="游ゴシック"/>
-        <a:font script="Hang" typeface="맑은 고딕"/>
-        <a:font script="Hans" typeface="等线"/>
-        <a:font script="Hant" typeface="新細明體"/>
-        <a:font script="Arab" typeface="Arial"/>
+        <a:ea typeface="Amiri" pitchFamily="2" charset="-78"/>
+        <a:cs typeface="Amiri" pitchFamily="2" charset="-78"/>
+        <a:font script="Arab" typeface="Amiri"/>
         <a:font script="Hebr" typeface="Arial"/>
         <a:font script="Thai" typeface="Cordia New"/>
         <a:font script="Ethi" typeface="Nyala"/>

--- a/Topic_D/Exam_Practice/TD-L01_Writing_Workshop_Learning_Institutions_and_Stages_of_Education.pptx
+++ b/Topic_D/Exam_Practice/TD-L01_Writing_Workshop_Learning_Institutions_and_Stages_of_Education.pptx
@@ -3848,7 +3848,7 @@
                 <a:solidFill>
                   <a:srgbClr val="FFFFFF"/>
                 </a:solidFill>
-                <a:latin typeface="Calibri" pitchFamily="34" charset="0"/>
+                <a:latin typeface="Amiri" pitchFamily="2" charset="-78"/>
                 <a:ea typeface="Amiri" pitchFamily="2" charset="-78"/>
                 <a:cs typeface="Amiri" pitchFamily="2" charset="-78"/>
               </a:rPr>
@@ -3914,7 +3914,7 @@
                 <a:solidFill>
                   <a:srgbClr val="FFFFFF"/>
                 </a:solidFill>
-                <a:latin typeface="Calibri" pitchFamily="34" charset="0"/>
+                <a:latin typeface="Amiri" pitchFamily="2" charset="-78"/>
                 <a:ea typeface="Amiri" pitchFamily="2" charset="-78"/>
                 <a:cs typeface="Amiri" pitchFamily="2" charset="-78"/>
               </a:rPr>
@@ -3980,7 +3980,7 @@
                 <a:solidFill>
                   <a:srgbClr val="FFFFFF"/>
                 </a:solidFill>
-                <a:latin typeface="Calibri" pitchFamily="34" charset="0"/>
+                <a:latin typeface="Amiri" pitchFamily="2" charset="-78"/>
                 <a:ea typeface="Amiri" pitchFamily="2" charset="-78"/>
                 <a:cs typeface="Amiri" pitchFamily="2" charset="-78"/>
               </a:rPr>
@@ -4046,7 +4046,7 @@
                 <a:solidFill>
                   <a:srgbClr val="FFFFFF"/>
                 </a:solidFill>
-                <a:latin typeface="Calibri" pitchFamily="34" charset="0"/>
+                <a:latin typeface="Amiri" pitchFamily="2" charset="-78"/>
                 <a:ea typeface="Amiri" pitchFamily="2" charset="-78"/>
                 <a:cs typeface="Amiri" pitchFamily="2" charset="-78"/>
               </a:rPr>
@@ -4844,7 +4844,7 @@
                 <a:solidFill>
                   <a:srgbClr val="FFFFFF"/>
                 </a:solidFill>
-                <a:latin typeface="Calibri" pitchFamily="34" charset="0"/>
+                <a:latin typeface="Amiri" pitchFamily="2" charset="-78"/>
                 <a:ea typeface="Amiri" pitchFamily="2" charset="-78"/>
                 <a:cs typeface="Amiri" pitchFamily="2" charset="-78"/>
               </a:rPr>
@@ -4910,7 +4910,7 @@
                 <a:solidFill>
                   <a:srgbClr val="FFFFFF"/>
                 </a:solidFill>
-                <a:latin typeface="Calibri" pitchFamily="34" charset="0"/>
+                <a:latin typeface="Amiri" pitchFamily="2" charset="-78"/>
                 <a:ea typeface="Amiri" pitchFamily="2" charset="-78"/>
                 <a:cs typeface="Amiri" pitchFamily="2" charset="-78"/>
               </a:rPr>
@@ -4976,7 +4976,7 @@
                 <a:solidFill>
                   <a:srgbClr val="FFFFFF"/>
                 </a:solidFill>
-                <a:latin typeface="Calibri" pitchFamily="34" charset="0"/>
+                <a:latin typeface="Amiri" pitchFamily="2" charset="-78"/>
                 <a:ea typeface="Amiri" pitchFamily="2" charset="-78"/>
                 <a:cs typeface="Amiri" pitchFamily="2" charset="-78"/>
               </a:rPr>
@@ -5042,7 +5042,7 @@
                 <a:solidFill>
                   <a:srgbClr val="FFFFFF"/>
                 </a:solidFill>
-                <a:latin typeface="Calibri" pitchFamily="34" charset="0"/>
+                <a:latin typeface="Amiri" pitchFamily="2" charset="-78"/>
                 <a:ea typeface="Amiri" pitchFamily="2" charset="-78"/>
                 <a:cs typeface="Amiri" pitchFamily="2" charset="-78"/>
               </a:rPr>
@@ -8599,7 +8599,7 @@
                 <a:solidFill>
                   <a:srgbClr val="FFFFFF"/>
                 </a:solidFill>
-                <a:latin typeface="Calibri" pitchFamily="34" charset="0"/>
+                <a:latin typeface="Amiri" pitchFamily="2" charset="-78"/>
                 <a:ea typeface="Amiri" pitchFamily="2" charset="-78"/>
                 <a:cs typeface="Amiri" pitchFamily="2" charset="-78"/>
               </a:rPr>
@@ -8665,7 +8665,7 @@
                 <a:solidFill>
                   <a:srgbClr val="FFFFFF"/>
                 </a:solidFill>
-                <a:latin typeface="Calibri" pitchFamily="34" charset="0"/>
+                <a:latin typeface="Amiri" pitchFamily="2" charset="-78"/>
                 <a:ea typeface="Amiri" pitchFamily="2" charset="-78"/>
                 <a:cs typeface="Amiri" pitchFamily="2" charset="-78"/>
               </a:rPr>
@@ -8731,7 +8731,7 @@
                 <a:solidFill>
                   <a:srgbClr val="FFFFFF"/>
                 </a:solidFill>
-                <a:latin typeface="Calibri" pitchFamily="34" charset="0"/>
+                <a:latin typeface="Amiri" pitchFamily="2" charset="-78"/>
                 <a:ea typeface="Amiri" pitchFamily="2" charset="-78"/>
                 <a:cs typeface="Amiri" pitchFamily="2" charset="-78"/>
               </a:rPr>
@@ -8797,7 +8797,7 @@
                 <a:solidFill>
                   <a:srgbClr val="FFFFFF"/>
                 </a:solidFill>
-                <a:latin typeface="Calibri" pitchFamily="34" charset="0"/>
+                <a:latin typeface="Amiri" pitchFamily="2" charset="-78"/>
                 <a:ea typeface="Amiri" pitchFamily="2" charset="-78"/>
                 <a:cs typeface="Amiri" pitchFamily="2" charset="-78"/>
               </a:rPr>
@@ -9584,7 +9584,7 @@
                 <a:solidFill>
                   <a:srgbClr val="FFFFFF"/>
                 </a:solidFill>
-                <a:latin typeface="Calibri" pitchFamily="34" charset="0"/>
+                <a:latin typeface="Amiri" pitchFamily="2" charset="-78"/>
                 <a:ea typeface="Amiri" pitchFamily="2" charset="-78"/>
                 <a:cs typeface="Amiri" pitchFamily="2" charset="-78"/>
               </a:rPr>
@@ -9650,7 +9650,7 @@
                 <a:solidFill>
                   <a:srgbClr val="FFFFFF"/>
                 </a:solidFill>
-                <a:latin typeface="Calibri" pitchFamily="34" charset="0"/>
+                <a:latin typeface="Amiri" pitchFamily="2" charset="-78"/>
                 <a:ea typeface="Amiri" pitchFamily="2" charset="-78"/>
                 <a:cs typeface="Amiri" pitchFamily="2" charset="-78"/>
               </a:rPr>
@@ -9716,7 +9716,7 @@
                 <a:solidFill>
                   <a:srgbClr val="FFFFFF"/>
                 </a:solidFill>
-                <a:latin typeface="Calibri" pitchFamily="34" charset="0"/>
+                <a:latin typeface="Amiri" pitchFamily="2" charset="-78"/>
                 <a:ea typeface="Amiri" pitchFamily="2" charset="-78"/>
                 <a:cs typeface="Amiri" pitchFamily="2" charset="-78"/>
               </a:rPr>
@@ -9782,7 +9782,7 @@
                 <a:solidFill>
                   <a:srgbClr val="FFFFFF"/>
                 </a:solidFill>
-                <a:latin typeface="Calibri" pitchFamily="34" charset="0"/>
+                <a:latin typeface="Amiri" pitchFamily="2" charset="-78"/>
                 <a:ea typeface="Amiri" pitchFamily="2" charset="-78"/>
                 <a:cs typeface="Amiri" pitchFamily="2" charset="-78"/>
               </a:rPr>
@@ -10569,7 +10569,7 @@
                 <a:solidFill>
                   <a:srgbClr val="FFFFFF"/>
                 </a:solidFill>
-                <a:latin typeface="Calibri" pitchFamily="34" charset="0"/>
+                <a:latin typeface="Amiri" pitchFamily="2" charset="-78"/>
                 <a:ea typeface="Amiri" pitchFamily="2" charset="-78"/>
                 <a:cs typeface="Amiri" pitchFamily="2" charset="-78"/>
               </a:rPr>
@@ -10635,7 +10635,7 @@
                 <a:solidFill>
                   <a:srgbClr val="FFFFFF"/>
                 </a:solidFill>
-                <a:latin typeface="Calibri" pitchFamily="34" charset="0"/>
+                <a:latin typeface="Amiri" pitchFamily="2" charset="-78"/>
                 <a:ea typeface="Amiri" pitchFamily="2" charset="-78"/>
                 <a:cs typeface="Amiri" pitchFamily="2" charset="-78"/>
               </a:rPr>
@@ -10701,7 +10701,7 @@
                 <a:solidFill>
                   <a:srgbClr val="FFFFFF"/>
                 </a:solidFill>
-                <a:latin typeface="Calibri" pitchFamily="34" charset="0"/>
+                <a:latin typeface="Amiri" pitchFamily="2" charset="-78"/>
                 <a:ea typeface="Amiri" pitchFamily="2" charset="-78"/>
                 <a:cs typeface="Amiri" pitchFamily="2" charset="-78"/>
               </a:rPr>
@@ -10767,7 +10767,7 @@
                 <a:solidFill>
                   <a:srgbClr val="FFFFFF"/>
                 </a:solidFill>
-                <a:latin typeface="Calibri" pitchFamily="34" charset="0"/>
+                <a:latin typeface="Amiri" pitchFamily="2" charset="-78"/>
                 <a:ea typeface="Amiri" pitchFamily="2" charset="-78"/>
                 <a:cs typeface="Amiri" pitchFamily="2" charset="-78"/>
               </a:rPr>
